--- a/BASiS__Bayesian_Style_based_Selection_for_Reflecting_Small_Corpus_Conversational_Style_into_Purpose_Specific_Dialogue_Systems/japanese/figures/BASiS_figures_editable.pptx
+++ b/BASiS__Bayesian_Style_based_Selection_for_Reflecting_Small_Corpus_Conversational_Style_into_Purpose_Specific_Dialogue_Systems/japanese/figures/BASiS_figures_editable.pptx
@@ -3196,7 +3196,7 @@
         <p:spPr>
           <a:xfrm>
             <a:off x="457200" y="374904"/>
-            <a:ext cx="2414016" cy="310896"/>
+            <a:ext cx="3364992" cy="310896"/>
           </a:xfrm>
           <a:prstGeom prst="roundRect">
             <a:avLst/>
@@ -3241,7 +3241,7 @@
         <p:spPr>
           <a:xfrm>
             <a:off x="493776" y="393192"/>
-            <a:ext cx="2340864" cy="274320"/>
+            <a:ext cx="3291840" cy="274320"/>
           </a:xfrm>
           <a:prstGeom prst="rect">
             <a:avLst/>
@@ -3272,7 +3272,7 @@
                 </a:solidFill>
                 <a:latin typeface="Aptos"/>
               </a:rPr>
-              <a:t>A   STYLE MODEL INDUCTION</a:t>
+              <a:t>A   DIALOGUE PROGRESSION MODEL INDUCTION</a:t>
             </a:r>
           </a:p>
         </p:txBody>
@@ -3497,7 +3497,7 @@
                 </a:solidFill>
                 <a:latin typeface="Aptos"/>
               </a:rPr>
-              <a:t>STYLE REFERENCE</a:t>
+              <a:t>PROGRESSION REFERENCE</a:t>
             </a:r>
           </a:p>
         </p:txBody>
@@ -4488,7 +4488,7 @@
                 </a:solidFill>
                 <a:latin typeface="Aptos Display"/>
               </a:rPr>
-              <a:t>Style Compatibility</a:t>
+              <a:t>Dialogue Progression</a:t>
             </a:r>
           </a:p>
           <a:p>
@@ -4901,7 +4901,7 @@
                 </a:solidFill>
                 <a:latin typeface="Aptos Display"/>
               </a:rPr>
-              <a:t>Style-adapted</a:t>
+              <a:t>Progression-adapted</a:t>
             </a:r>
           </a:p>
           <a:p>
@@ -6351,7 +6351,7 @@
                 </a:solidFill>
                 <a:latin typeface="Aptos Display"/>
               </a:rPr>
-              <a:t>STYLE SCORE</a:t>
+              <a:t>PROGRESSION SCORE</a:t>
             </a:r>
           </a:p>
         </p:txBody>
@@ -8831,7 +8831,7 @@
       </p:sp>
       <p:sp>
         <p:nvSpPr>
-          <p:cNvPr id="68" name="Style score equation"/>
+          <p:cNvPr id="68" name="Progression score equation"/>
           <p:cNvSpPr txBox="1"/>
           <p:nvPr/>
         </p:nvSpPr>
@@ -9055,7 +9055,7 @@
       </p:sp>
       <p:sp>
         <p:nvSpPr>
-          <p:cNvPr id="72" name="Style compatibility score"/>
+          <p:cNvPr id="72" name="Progression compatibility score"/>
           <p:cNvSpPr txBox="1"/>
           <p:nvPr/>
         </p:nvSpPr>
@@ -9100,7 +9100,7 @@
       </p:sp>
       <p:sp>
         <p:nvSpPr>
-          <p:cNvPr id="73" name="Style compatibility label"/>
+          <p:cNvPr id="73" name="Progression compatibility label"/>
           <p:cNvSpPr txBox="1"/>
           <p:nvPr/>
         </p:nvSpPr>
@@ -9138,7 +9138,7 @@
                 </a:solidFill>
                 <a:latin typeface="Aptos"/>
               </a:rPr>
-              <a:t>style compatibility</a:t>
+              <a:t>progression compatibility</a:t>
             </a:r>
           </a:p>
         </p:txBody>

--- a/BASiS__Bayesian_Style_based_Selection_for_Reflecting_Small_Corpus_Conversational_Style_into_Purpose_Specific_Dialogue_Systems/japanese/figures/BASiS_figures_editable.pptx
+++ b/BASiS__Bayesian_Style_based_Selection_for_Reflecting_Small_Corpus_Conversational_Style_into_Purpose_Specific_Dialogue_Systems/japanese/figures/BASiS_figures_editable.pptx
@@ -3272,7 +3272,7 @@
                 </a:solidFill>
                 <a:latin typeface="Aptos"/>
               </a:rPr>
-              <a:t>A   DIALOGUE PROGRESSION MODEL INDUCTION</a:t>
+              <a:t>A   DIALOGUE PROGRESSION MODELING</a:t>
             </a:r>
           </a:p>
         </p:txBody>
@@ -3593,7 +3593,7 @@
       </p:sp>
       <p:sp>
         <p:nvSpPr>
-          <p:cNvPr id="12" name="Module 1 card"/>
+          <p:cNvPr id="12" name="Step 1 card"/>
           <p:cNvSpPr/>
           <p:nvPr/>
         </p:nvSpPr>
@@ -3638,7 +3638,7 @@
       </p:sp>
       <p:sp>
         <p:nvSpPr>
-          <p:cNvPr id="13" name="Module 1 badge"/>
+          <p:cNvPr id="13" name="Step 1 badge"/>
           <p:cNvSpPr/>
           <p:nvPr/>
         </p:nvSpPr>
@@ -3692,7 +3692,7 @@
       </p:sp>
       <p:sp>
         <p:nvSpPr>
-          <p:cNvPr id="14" name="Module 1 title"/>
+          <p:cNvPr id="14" name="Step 1 title"/>
           <p:cNvSpPr txBox="1"/>
           <p:nvPr/>
         </p:nvSpPr>
@@ -3759,7 +3759,7 @@
       </p:sp>
       <p:sp>
         <p:nvSpPr>
-          <p:cNvPr id="15" name="Module 1 details"/>
+          <p:cNvPr id="15" name="Step 1 details"/>
           <p:cNvSpPr txBox="1"/>
           <p:nvPr/>
         </p:nvSpPr>
@@ -3804,7 +3804,7 @@
       </p:sp>
       <p:sp>
         <p:nvSpPr>
-          <p:cNvPr id="16" name="Module 2 card"/>
+          <p:cNvPr id="16" name="Step 2 card"/>
           <p:cNvSpPr/>
           <p:nvPr/>
         </p:nvSpPr>
@@ -3849,7 +3849,7 @@
       </p:sp>
       <p:sp>
         <p:nvSpPr>
-          <p:cNvPr id="17" name="Module 2 badge"/>
+          <p:cNvPr id="17" name="Step 2 badge"/>
           <p:cNvSpPr/>
           <p:nvPr/>
         </p:nvSpPr>
@@ -3903,7 +3903,7 @@
       </p:sp>
       <p:sp>
         <p:nvSpPr>
-          <p:cNvPr id="18" name="Module 2 title"/>
+          <p:cNvPr id="18" name="Step 2 title"/>
           <p:cNvSpPr txBox="1"/>
           <p:nvPr/>
         </p:nvSpPr>
@@ -3970,7 +3970,7 @@
       </p:sp>
       <p:sp>
         <p:nvSpPr>
-          <p:cNvPr id="19" name="Module 2 details"/>
+          <p:cNvPr id="19" name="Step 2 details"/>
           <p:cNvSpPr txBox="1"/>
           <p:nvPr/>
         </p:nvSpPr>
@@ -4351,7 +4351,7 @@
       </p:sp>
       <p:sp>
         <p:nvSpPr>
-          <p:cNvPr id="26" name="Module 3 card"/>
+          <p:cNvPr id="26" name="Step 3 card"/>
           <p:cNvSpPr/>
           <p:nvPr/>
         </p:nvSpPr>
@@ -4396,7 +4396,7 @@
       </p:sp>
       <p:sp>
         <p:nvSpPr>
-          <p:cNvPr id="27" name="Module 3 badge"/>
+          <p:cNvPr id="27" name="Step 3 badge"/>
           <p:cNvSpPr/>
           <p:nvPr/>
         </p:nvSpPr>
@@ -4450,7 +4450,7 @@
       </p:sp>
       <p:sp>
         <p:nvSpPr>
-          <p:cNvPr id="28" name="Module 3 title"/>
+          <p:cNvPr id="28" name="Step 3 title"/>
           <p:cNvSpPr txBox="1"/>
           <p:nvPr/>
         </p:nvSpPr>
@@ -4517,7 +4517,7 @@
       </p:sp>
       <p:sp>
         <p:nvSpPr>
-          <p:cNvPr id="29" name="Module 3 details"/>
+          <p:cNvPr id="29" name="Step 3 details"/>
           <p:cNvSpPr txBox="1"/>
           <p:nvPr/>
         </p:nvSpPr>
@@ -4562,7 +4562,7 @@
       </p:sp>
       <p:sp>
         <p:nvSpPr>
-          <p:cNvPr id="30" name="Module 4 card"/>
+          <p:cNvPr id="30" name="Step 4 card"/>
           <p:cNvSpPr/>
           <p:nvPr/>
         </p:nvSpPr>
@@ -4607,7 +4607,7 @@
       </p:sp>
       <p:sp>
         <p:nvSpPr>
-          <p:cNvPr id="31" name="Module 4 badge"/>
+          <p:cNvPr id="31" name="Step 4 badge"/>
           <p:cNvSpPr/>
           <p:nvPr/>
         </p:nvSpPr>
@@ -4661,7 +4661,7 @@
       </p:sp>
       <p:sp>
         <p:nvSpPr>
-          <p:cNvPr id="32" name="Module 4 title"/>
+          <p:cNvPr id="32" name="Step 4 title"/>
           <p:cNvSpPr txBox="1"/>
           <p:nvPr/>
         </p:nvSpPr>
@@ -4728,7 +4728,7 @@
       </p:sp>
       <p:sp>
         <p:nvSpPr>
-          <p:cNvPr id="33" name="Module 4 details"/>
+          <p:cNvPr id="33" name="Step 4 details"/>
           <p:cNvSpPr txBox="1"/>
           <p:nvPr/>
         </p:nvSpPr>
@@ -4773,7 +4773,7 @@
       </p:sp>
       <p:sp>
         <p:nvSpPr>
-          <p:cNvPr id="34" name="Output LLM card"/>
+          <p:cNvPr id="34" name="Output adapter card"/>
           <p:cNvSpPr/>
           <p:nvPr/>
         </p:nvSpPr>
@@ -4818,7 +4818,7 @@
       </p:sp>
       <p:sp>
         <p:nvSpPr>
-          <p:cNvPr id="35" name="Output LLM chip icon"/>
+          <p:cNvPr id="35" name="Output adapter chip icon"/>
           <p:cNvSpPr/>
           <p:nvPr/>
         </p:nvSpPr>
@@ -4863,7 +4863,7 @@
       </p:sp>
       <p:sp>
         <p:nvSpPr>
-          <p:cNvPr id="36" name="Output LLM label"/>
+          <p:cNvPr id="36" name="Output adapter label"/>
           <p:cNvSpPr txBox="1"/>
           <p:nvPr/>
         </p:nvSpPr>
@@ -4901,7 +4901,7 @@
                 </a:solidFill>
                 <a:latin typeface="Aptos Display"/>
               </a:rPr>
-              <a:t>Progression-adapted</a:t>
+              <a:t>DPO-trained</a:t>
             </a:r>
           </a:p>
           <a:p>
@@ -4923,14 +4923,14 @@
                 </a:solidFill>
                 <a:latin typeface="Aptos Display"/>
               </a:rPr>
-              <a:t>local LLM</a:t>
+              <a:t>LoRA adapter</a:t>
             </a:r>
           </a:p>
         </p:txBody>
       </p:sp>
       <p:cxnSp>
         <p:nvCxnSpPr>
-          <p:cNvPr id="37" name="Small corpus to Module 1"/>
+          <p:cNvPr id="37" name="Small corpus to Step 1"/>
           <p:cNvCxnSpPr/>
           <p:nvPr/>
         </p:nvCxnSpPr>
@@ -4966,7 +4966,7 @@
       </p:cxnSp>
       <p:cxnSp>
         <p:nvCxnSpPr>
-          <p:cNvPr id="38" name="Module 1 to Module 2"/>
+          <p:cNvPr id="38" name="Step 1 to Step 2"/>
           <p:cNvCxnSpPr/>
           <p:nvPr/>
         </p:nvCxnSpPr>
@@ -5540,7 +5540,7 @@
       </p:sp>
       <p:cxnSp>
         <p:nvCxnSpPr>
-          <p:cNvPr id="52" name="DPO to output LLM"/>
+          <p:cNvPr id="52" name="DPO to output adapter"/>
           <p:cNvCxnSpPr/>
           <p:nvPr/>
         </p:nvCxnSpPr>
@@ -5576,7 +5576,7 @@
       </p:cxnSp>
       <p:sp>
         <p:nvSpPr>
-          <p:cNvPr id="53" name="LoRA DPO label background"/>
+          <p:cNvPr id="53" name="Trained adapter label background"/>
           <p:cNvSpPr/>
           <p:nvPr/>
         </p:nvSpPr>
@@ -5621,7 +5621,7 @@
       </p:sp>
       <p:sp>
         <p:nvSpPr>
-          <p:cNvPr id="54" name="LoRA DPO label"/>
+          <p:cNvPr id="54" name="Trained adapter label"/>
           <p:cNvSpPr txBox="1"/>
           <p:nvPr/>
         </p:nvSpPr>
@@ -5659,7 +5659,7 @@
                 </a:solidFill>
                 <a:latin typeface="Aptos"/>
               </a:rPr>
-              <a:t>LoRA–DPO</a:t>
+              <a:t>trained adapter</a:t>
             </a:r>
           </a:p>
         </p:txBody>
@@ -5782,16 +5782,16 @@
       </p:sp>
       <p:sp>
         <p:nvSpPr>
-          <p:cNvPr id="4" name="Prior step"/>
+          <p:cNvPr id="4" name="Prior operation"/>
           <p:cNvSpPr/>
           <p:nvPr/>
         </p:nvSpPr>
         <p:spPr>
           <a:xfrm>
-            <a:off x="182880" y="1060704"/>
-            <a:ext cx="329184" cy="329184"/>
-          </a:xfrm>
-          <a:prstGeom prst="ellipse">
+            <a:off x="182880" y="1078992"/>
+            <a:ext cx="420624" cy="292608"/>
+          </a:xfrm>
+          <a:prstGeom prst="roundRect">
             <a:avLst/>
           </a:prstGeom>
           <a:solidFill>
@@ -5823,13 +5823,13 @@
           <a:p>
             <a:pPr algn="ctr"/>
             <a:r>
-              <a:rPr sz="900" b="1">
+              <a:rPr sz="850" b="1">
                 <a:solidFill>
                   <a:srgbClr val="FFFFFF"/>
                 </a:solidFill>
                 <a:latin typeface="Aptos"/>
               </a:rPr>
-              <a:t>1</a:t>
+              <a:t>(a)</a:t>
             </a:r>
           </a:p>
         </p:txBody>
@@ -5926,16 +5926,16 @@
       </p:sp>
       <p:sp>
         <p:nvSpPr>
-          <p:cNvPr id="7" name="Predict step"/>
+          <p:cNvPr id="7" name="Predict operation"/>
           <p:cNvSpPr/>
           <p:nvPr/>
         </p:nvSpPr>
         <p:spPr>
           <a:xfrm>
-            <a:off x="2395728" y="1060704"/>
-            <a:ext cx="329184" cy="329184"/>
-          </a:xfrm>
-          <a:prstGeom prst="ellipse">
+            <a:off x="2395728" y="1078992"/>
+            <a:ext cx="420624" cy="292608"/>
+          </a:xfrm>
+          <a:prstGeom prst="roundRect">
             <a:avLst/>
           </a:prstGeom>
           <a:solidFill>
@@ -5967,13 +5967,13 @@
           <a:p>
             <a:pPr algn="ctr"/>
             <a:r>
-              <a:rPr sz="900" b="1">
+              <a:rPr sz="850" b="1">
                 <a:solidFill>
                   <a:srgbClr val="FFFFFF"/>
                 </a:solidFill>
                 <a:latin typeface="Aptos"/>
               </a:rPr>
-              <a:t>2</a:t>
+              <a:t>(b)</a:t>
             </a:r>
           </a:p>
         </p:txBody>
@@ -6070,16 +6070,16 @@
       </p:sp>
       <p:sp>
         <p:nvSpPr>
-          <p:cNvPr id="10" name="Observe step"/>
+          <p:cNvPr id="10" name="Observe operation"/>
           <p:cNvSpPr/>
           <p:nvPr/>
         </p:nvSpPr>
         <p:spPr>
           <a:xfrm>
-            <a:off x="4608576" y="1060704"/>
-            <a:ext cx="329184" cy="329184"/>
-          </a:xfrm>
-          <a:prstGeom prst="ellipse">
+            <a:off x="4608576" y="1078992"/>
+            <a:ext cx="420624" cy="292608"/>
+          </a:xfrm>
+          <a:prstGeom prst="roundRect">
             <a:avLst/>
           </a:prstGeom>
           <a:solidFill>
@@ -6111,13 +6111,13 @@
           <a:p>
             <a:pPr algn="ctr"/>
             <a:r>
-              <a:rPr sz="900" b="1">
+              <a:rPr sz="850" b="1">
                 <a:solidFill>
                   <a:srgbClr val="FFFFFF"/>
                 </a:solidFill>
                 <a:latin typeface="Aptos"/>
               </a:rPr>
-              <a:t>3</a:t>
+              <a:t>(c)</a:t>
             </a:r>
           </a:p>
         </p:txBody>
@@ -6214,16 +6214,16 @@
       </p:sp>
       <p:sp>
         <p:nvSpPr>
-          <p:cNvPr id="13" name="Update step"/>
+          <p:cNvPr id="13" name="Update operation"/>
           <p:cNvSpPr/>
           <p:nvPr/>
         </p:nvSpPr>
         <p:spPr>
           <a:xfrm>
-            <a:off x="6821424" y="1060704"/>
-            <a:ext cx="329184" cy="329184"/>
-          </a:xfrm>
-          <a:prstGeom prst="ellipse">
+            <a:off x="6821424" y="1078992"/>
+            <a:ext cx="420624" cy="292608"/>
+          </a:xfrm>
+          <a:prstGeom prst="roundRect">
             <a:avLst/>
           </a:prstGeom>
           <a:solidFill>
@@ -6255,13 +6255,13 @@
           <a:p>
             <a:pPr algn="ctr"/>
             <a:r>
-              <a:rPr sz="900" b="1">
+              <a:rPr sz="850" b="1">
                 <a:solidFill>
                   <a:srgbClr val="FFFFFF"/>
                 </a:solidFill>
                 <a:latin typeface="Aptos"/>
               </a:rPr>
-              <a:t>4</a:t>
+              <a:t>(d)</a:t>
             </a:r>
           </a:p>
         </p:txBody>
@@ -6358,16 +6358,16 @@
       </p:sp>
       <p:sp>
         <p:nvSpPr>
-          <p:cNvPr id="16" name="Score step"/>
+          <p:cNvPr id="16" name="Score operation"/>
           <p:cNvSpPr/>
           <p:nvPr/>
         </p:nvSpPr>
         <p:spPr>
           <a:xfrm>
-            <a:off x="9838944" y="1060704"/>
-            <a:ext cx="329184" cy="329184"/>
-          </a:xfrm>
-          <a:prstGeom prst="ellipse">
+            <a:off x="9838944" y="1078992"/>
+            <a:ext cx="420624" cy="292608"/>
+          </a:xfrm>
+          <a:prstGeom prst="roundRect">
             <a:avLst/>
           </a:prstGeom>
           <a:solidFill>
@@ -6399,13 +6399,13 @@
           <a:p>
             <a:pPr algn="ctr"/>
             <a:r>
-              <a:rPr sz="900" b="1">
+              <a:rPr sz="850" b="1">
                 <a:solidFill>
                   <a:srgbClr val="FFFFFF"/>
                 </a:solidFill>
                 <a:latin typeface="Aptos"/>
               </a:rPr>
-              <a:t>5</a:t>
+              <a:t>(e)</a:t>
             </a:r>
           </a:p>
         </p:txBody>

--- a/BASiS__Bayesian_Style_based_Selection_for_Reflecting_Small_Corpus_Conversational_Style_into_Purpose_Specific_Dialogue_Systems/japanese/figures/BASiS_figures_editable.pptx
+++ b/BASiS__Bayesian_Style_based_Selection_for_Reflecting_Small_Corpus_Conversational_Style_into_Purpose_Specific_Dialogue_Systems/japanese/figures/BASiS_figures_editable.pptx
@@ -3195,7 +3195,7 @@
         </p:nvSpPr>
         <p:spPr>
           <a:xfrm>
-            <a:off x="457200" y="374904"/>
+            <a:off x="457200" y="466344"/>
             <a:ext cx="3364992" cy="310896"/>
           </a:xfrm>
           <a:prstGeom prst="roundRect">
@@ -3240,7 +3240,7 @@
         </p:nvSpPr>
         <p:spPr>
           <a:xfrm>
-            <a:off x="493776" y="393192"/>
+            <a:off x="493776" y="484632"/>
             <a:ext cx="3291840" cy="274320"/>
           </a:xfrm>
           <a:prstGeom prst="rect">
@@ -3285,7 +3285,7 @@
         </p:nvSpPr>
         <p:spPr>
           <a:xfrm>
-            <a:off x="457200" y="3438144"/>
+            <a:off x="457200" y="3529584"/>
             <a:ext cx="2843784" cy="310896"/>
           </a:xfrm>
           <a:prstGeom prst="roundRect">
@@ -3330,7 +3330,7 @@
         </p:nvSpPr>
         <p:spPr>
           <a:xfrm>
-            <a:off x="493776" y="3456432"/>
+            <a:off x="493776" y="3547872"/>
             <a:ext cx="2770632" cy="274320"/>
           </a:xfrm>
           <a:prstGeom prst="rect">
@@ -5582,8 +5582,8 @@
         </p:nvSpPr>
         <p:spPr>
           <a:xfrm>
-            <a:off x="8586216" y="4581144"/>
-            <a:ext cx="713232" cy="219456"/>
+            <a:off x="8567928" y="4581144"/>
+            <a:ext cx="658368" cy="219456"/>
           </a:xfrm>
           <a:prstGeom prst="roundRect">
             <a:avLst/>
@@ -5627,8 +5627,8 @@
         </p:nvSpPr>
         <p:spPr>
           <a:xfrm>
-            <a:off x="8586216" y="4581144"/>
-            <a:ext cx="713232" cy="219456"/>
+            <a:off x="8567928" y="4581144"/>
+            <a:ext cx="658368" cy="219456"/>
           </a:xfrm>
           <a:prstGeom prst="rect">
             <a:avLst/>
@@ -5653,7 +5653,7 @@
               </a:spcAft>
             </a:pPr>
             <a:r>
-              <a:rPr sz="780" b="0">
+              <a:rPr sz="700" b="0">
                 <a:solidFill>
                   <a:srgbClr val="D97745"/>
                 </a:solidFill>
@@ -5788,8 +5788,8 @@
         </p:nvSpPr>
         <p:spPr>
           <a:xfrm>
-            <a:off x="182880" y="1078992"/>
-            <a:ext cx="420624" cy="292608"/>
+            <a:off x="201168" y="1088136"/>
+            <a:ext cx="329184" cy="246888"/>
           </a:xfrm>
           <a:prstGeom prst="roundRect">
             <a:avLst/>
@@ -5823,7 +5823,7 @@
           <a:p>
             <a:pPr algn="ctr"/>
             <a:r>
-              <a:rPr sz="850" b="1">
+              <a:rPr sz="730" b="1">
                 <a:solidFill>
                   <a:srgbClr val="FFFFFF"/>
                 </a:solidFill>
@@ -5932,8 +5932,8 @@
         </p:nvSpPr>
         <p:spPr>
           <a:xfrm>
-            <a:off x="2395728" y="1078992"/>
-            <a:ext cx="420624" cy="292608"/>
+            <a:off x="2414016" y="1088136"/>
+            <a:ext cx="329184" cy="246888"/>
           </a:xfrm>
           <a:prstGeom prst="roundRect">
             <a:avLst/>
@@ -5967,7 +5967,7 @@
           <a:p>
             <a:pPr algn="ctr"/>
             <a:r>
-              <a:rPr sz="850" b="1">
+              <a:rPr sz="730" b="1">
                 <a:solidFill>
                   <a:srgbClr val="FFFFFF"/>
                 </a:solidFill>
@@ -6076,8 +6076,8 @@
         </p:nvSpPr>
         <p:spPr>
           <a:xfrm>
-            <a:off x="4608576" y="1078992"/>
-            <a:ext cx="420624" cy="292608"/>
+            <a:off x="4626864" y="1088136"/>
+            <a:ext cx="329184" cy="246888"/>
           </a:xfrm>
           <a:prstGeom prst="roundRect">
             <a:avLst/>
@@ -6111,7 +6111,7 @@
           <a:p>
             <a:pPr algn="ctr"/>
             <a:r>
-              <a:rPr sz="850" b="1">
+              <a:rPr sz="730" b="1">
                 <a:solidFill>
                   <a:srgbClr val="FFFFFF"/>
                 </a:solidFill>
@@ -6176,7 +6176,7 @@
         <p:spPr>
           <a:xfrm>
             <a:off x="7077455" y="1261872"/>
-            <a:ext cx="2414016" cy="274320"/>
+            <a:ext cx="2414015" cy="274320"/>
           </a:xfrm>
           <a:prstGeom prst="rect">
             <a:avLst/>
@@ -6220,8 +6220,8 @@
         </p:nvSpPr>
         <p:spPr>
           <a:xfrm>
-            <a:off x="6821424" y="1078992"/>
-            <a:ext cx="420624" cy="292608"/>
+            <a:off x="6839712" y="1088136"/>
+            <a:ext cx="329184" cy="246888"/>
           </a:xfrm>
           <a:prstGeom prst="roundRect">
             <a:avLst/>
@@ -6255,7 +6255,7 @@
           <a:p>
             <a:pPr algn="ctr"/>
             <a:r>
-              <a:rPr sz="850" b="1">
+              <a:rPr sz="730" b="1">
                 <a:solidFill>
                   <a:srgbClr val="FFFFFF"/>
                 </a:solidFill>
@@ -6364,8 +6364,8 @@
         </p:nvSpPr>
         <p:spPr>
           <a:xfrm>
-            <a:off x="9838944" y="1078992"/>
-            <a:ext cx="420624" cy="292608"/>
+            <a:off x="9857232" y="1088136"/>
+            <a:ext cx="329184" cy="246888"/>
           </a:xfrm>
           <a:prstGeom prst="roundRect">
             <a:avLst/>
@@ -6399,7 +6399,7 @@
           <a:p>
             <a:pPr algn="ctr"/>
             <a:r>
-              <a:rPr sz="850" b="1">
+              <a:rPr sz="730" b="1">
                 <a:solidFill>
                   <a:srgbClr val="FFFFFF"/>
                 </a:solidFill>
